--- a/quarto/pres_doc.pptx
+++ b/quarto/pres_doc.pptx
@@ -9,12 +9,6 @@
     <p:sldId id="257" r:id="rId3"/>
     <p:sldId id="258" r:id="rId4"/>
     <p:sldId id="259" r:id="rId5"/>
-    <p:sldId id="260" r:id="rId6"/>
-    <p:sldId id="261" r:id="rId7"/>
-    <p:sldId id="262" r:id="rId8"/>
-    <p:sldId id="263" r:id="rId9"/>
-    <p:sldId id="264" r:id="rId10"/>
-    <p:sldId id="265" r:id="rId11"/>
   </p:sldIdLst>
   <p:sldSz cx="9144000" cy="5143500" type="screen16x9"/>
   <p:notesSz cx="6858000" cy="9144000"/>
@@ -3124,7 +3118,7 @@
             </a:pPr>
             <a:r>
               <a:rPr/>
-              <a:t>test</a:t>
+              <a:t>Power Point presentation</a:t>
             </a:r>
           </a:p>
         </p:txBody>
@@ -3154,313 +3148,13 @@
             </a:pPr>
             <a:br/>
             <a:br/>
-          </a:p>
-        </p:txBody>
-      </p:sp>
-    </p:spTree>
-  </p:cSld>
-</p:sld>
-</file>
-
-<file path=ppt/slides/slide10.xml><?xml version="1.0" encoding="utf-8"?>
-<p:sld xmlns:a="http://schemas.openxmlformats.org/drawingml/2006/main" xmlns:r="http://schemas.openxmlformats.org/officeDocument/2006/relationships" xmlns:p="http://schemas.openxmlformats.org/presentationml/2006/main">
-  <p:cSld>
-    <p:spTree>
-      <p:nvGrpSpPr>
-        <p:cNvPr id="1" name=""/>
-        <p:cNvGrpSpPr/>
-        <p:nvPr/>
-      </p:nvGrpSpPr>
-      <p:grpSpPr>
-        <a:xfrm>
-          <a:off x="0" y="0"/>
-          <a:ext cx="0" cy="0"/>
-          <a:chOff x="0" y="0"/>
-          <a:chExt cx="0" cy="0"/>
-        </a:xfrm>
-      </p:grpSpPr>
-      <p:graphicFrame>
-        <p:nvGraphicFramePr>
-          <p:cNvPr id="6" name="Content Placeholder 5"/>
-          <p:cNvGraphicFramePr>
-            <a:graphicFrameLocks noGrp="1"/>
-          </p:cNvGraphicFramePr>
-          <p:nvPr>
-            <p:ph idx="1"/>
-          </p:nvPr>
-        </p:nvGraphicFramePr>
-        <p:xfrm>
-          <a:off x="457200" y="1193800"/>
-          <a:ext cx="8229600" cy="3390900"/>
-        </p:xfrm>
-        <a:graphic>
-          <a:graphicData uri="http://schemas.openxmlformats.org/drawingml/2006/table">
-            <a:tbl>
-              <a:tblPr firstRow="1" bandRow="1">
-                <a:tableStyleId>{5C22544A-7EE6-4342-B048-85BDC9FD1C3A}</a:tableStyleId>
-              </a:tblPr>
-              <a:tblGrid>
-                <a:gridCol w="2057400"/>
-                <a:gridCol w="2057400"/>
-                <a:gridCol w="2057400"/>
-                <a:gridCol w="2057400"/>
-              </a:tblGrid>
-              <a:tr h="0">
-                <a:tc>
-                  <a:txBody>
-                    <a:bodyPr/>
-                    <a:lstStyle/>
-                    <a:p>
-                      <a:pPr lvl="0" indent="0" marL="0" algn="r">
-                        <a:buNone/>
-                      </a:pPr>
-                      <a:r>
-                        <a:rPr/>
-                        <a:t>Right</a:t>
-                      </a:r>
-                    </a:p>
-                  </a:txBody>
-                  <a:tcPr/>
-                </a:tc>
-                <a:tc>
-                  <a:txBody>
-                    <a:bodyPr/>
-                    <a:lstStyle/>
-                    <a:p>
-                      <a:pPr lvl="0" indent="0" marL="0" algn="l">
-                        <a:buNone/>
-                      </a:pPr>
-                      <a:r>
-                        <a:rPr/>
-                        <a:t>Left</a:t>
-                      </a:r>
-                    </a:p>
-                  </a:txBody>
-                  <a:tcPr/>
-                </a:tc>
-                <a:tc>
-                  <a:txBody>
-                    <a:bodyPr/>
-                    <a:lstStyle/>
-                    <a:p>
-                      <a:pPr lvl="0" indent="0" marL="0">
-                        <a:buNone/>
-                      </a:pPr>
-                      <a:r>
-                        <a:rPr/>
-                        <a:t>Default</a:t>
-                      </a:r>
-                    </a:p>
-                  </a:txBody>
-                  <a:tcPr/>
-                </a:tc>
-                <a:tc>
-                  <a:txBody>
-                    <a:bodyPr/>
-                    <a:lstStyle/>
-                    <a:p>
-                      <a:pPr lvl="0" indent="0" marL="0" algn="ctr">
-                        <a:buNone/>
-                      </a:pPr>
-                      <a:r>
-                        <a:rPr/>
-                        <a:t>Center</a:t>
-                      </a:r>
-                    </a:p>
-                  </a:txBody>
-                  <a:tcPr/>
-                </a:tc>
-              </a:tr>
-              <a:tr h="0">
-                <a:tc>
-                  <a:txBody>
-                    <a:bodyPr/>
-                    <a:lstStyle/>
-                    <a:p>
-                      <a:pPr lvl="0" indent="0" marL="0" algn="r">
-                        <a:buNone/>
-                      </a:pPr>
-                      <a:r>
-                        <a:rPr/>
-                        <a:t>12</a:t>
-                      </a:r>
-                    </a:p>
-                  </a:txBody>
-                </a:tc>
-                <a:tc>
-                  <a:txBody>
-                    <a:bodyPr/>
-                    <a:lstStyle/>
-                    <a:p>
-                      <a:pPr lvl="0" indent="0" marL="0" algn="l">
-                        <a:buNone/>
-                      </a:pPr>
-                      <a:r>
-                        <a:rPr/>
-                        <a:t>12</a:t>
-                      </a:r>
-                    </a:p>
-                  </a:txBody>
-                </a:tc>
-                <a:tc>
-                  <a:txBody>
-                    <a:bodyPr/>
-                    <a:lstStyle/>
-                    <a:p>
-                      <a:pPr lvl="0" indent="0" marL="0">
-                        <a:buNone/>
-                      </a:pPr>
-                      <a:r>
-                        <a:rPr/>
-                        <a:t>12</a:t>
-                      </a:r>
-                    </a:p>
-                  </a:txBody>
-                </a:tc>
-                <a:tc>
-                  <a:txBody>
-                    <a:bodyPr/>
-                    <a:lstStyle/>
-                    <a:p>
-                      <a:pPr lvl="0" indent="0" marL="0" algn="ctr">
-                        <a:buNone/>
-                      </a:pPr>
-                      <a:r>
-                        <a:rPr/>
-                        <a:t>12</a:t>
-                      </a:r>
-                    </a:p>
-                  </a:txBody>
-                </a:tc>
-              </a:tr>
-              <a:tr h="0">
-                <a:tc>
-                  <a:txBody>
-                    <a:bodyPr/>
-                    <a:lstStyle/>
-                    <a:p>
-                      <a:pPr lvl="0" indent="0" marL="0" algn="r">
-                        <a:buNone/>
-                      </a:pPr>
-                      <a:r>
-                        <a:rPr/>
-                        <a:t>123</a:t>
-                      </a:r>
-                    </a:p>
-                  </a:txBody>
-                </a:tc>
-                <a:tc>
-                  <a:txBody>
-                    <a:bodyPr/>
-                    <a:lstStyle/>
-                    <a:p>
-                      <a:pPr lvl="0" indent="0" marL="0" algn="l">
-                        <a:buNone/>
-                      </a:pPr>
-                      <a:r>
-                        <a:rPr/>
-                        <a:t>123</a:t>
-                      </a:r>
-                    </a:p>
-                  </a:txBody>
-                </a:tc>
-                <a:tc>
-                  <a:txBody>
-                    <a:bodyPr/>
-                    <a:lstStyle/>
-                    <a:p>
-                      <a:pPr lvl="0" indent="0" marL="0">
-                        <a:buNone/>
-                      </a:pPr>
-                      <a:r>
-                        <a:rPr/>
-                        <a:t>123</a:t>
-                      </a:r>
-                    </a:p>
-                  </a:txBody>
-                </a:tc>
-                <a:tc>
-                  <a:txBody>
-                    <a:bodyPr/>
-                    <a:lstStyle/>
-                    <a:p>
-                      <a:pPr lvl="0" indent="0" marL="0" algn="ctr">
-                        <a:buNone/>
-                      </a:pPr>
-                      <a:r>
-                        <a:rPr/>
-                        <a:t>123</a:t>
-                      </a:r>
-                    </a:p>
-                  </a:txBody>
-                </a:tc>
-              </a:tr>
-              <a:tr h="0">
-                <a:tc>
-                  <a:txBody>
-                    <a:bodyPr/>
-                    <a:lstStyle/>
-                    <a:p>
-                      <a:pPr lvl="0" indent="0" marL="0" algn="r">
-                        <a:buNone/>
-                      </a:pPr>
-                      <a:r>
-                        <a:rPr/>
-                        <a:t>1</a:t>
-                      </a:r>
-                    </a:p>
-                  </a:txBody>
-                </a:tc>
-                <a:tc>
-                  <a:txBody>
-                    <a:bodyPr/>
-                    <a:lstStyle/>
-                    <a:p>
-                      <a:pPr lvl="0" indent="0" marL="0" algn="l">
-                        <a:buNone/>
-                      </a:pPr>
-                      <a:r>
-                        <a:rPr/>
-                        <a:t>1</a:t>
-                      </a:r>
-                    </a:p>
-                  </a:txBody>
-                </a:tc>
-                <a:tc>
-                  <a:txBody>
-                    <a:bodyPr/>
-                    <a:lstStyle/>
-                    <a:p>
-                      <a:pPr lvl="0" indent="0" marL="0">
-                        <a:buNone/>
-                      </a:pPr>
-                      <a:r>
-                        <a:rPr/>
-                        <a:t>1</a:t>
-                      </a:r>
-                    </a:p>
-                  </a:txBody>
-                </a:tc>
-                <a:tc>
-                  <a:txBody>
-                    <a:bodyPr/>
-                    <a:lstStyle/>
-                    <a:p>
-                      <a:pPr lvl="0" indent="0" marL="0" algn="ctr">
-                        <a:buNone/>
-                      </a:pPr>
-                      <a:r>
-                        <a:rPr/>
-                        <a:t>1</a:t>
-                      </a:r>
-                    </a:p>
-                  </a:txBody>
-                </a:tc>
-              </a:tr>
-            </a:tbl>
-          </a:graphicData>
-        </a:graphic>
-      </p:graphicFrame>
+            <a:r>
+              <a:rPr/>
+              <a:t>John Doe</a:t>
+            </a:r>
+          </a:p>
+        </p:txBody>
+      </p:sp>
     </p:spTree>
   </p:cSld>
 </p:sld>
@@ -3485,6 +3179,31 @@
       </p:grpSpPr>
       <p:sp>
         <p:nvSpPr>
+          <p:cNvPr id="2" name="Title 1"/>
+          <p:cNvSpPr>
+            <a:spLocks noGrp="1"/>
+          </p:cNvSpPr>
+          <p:nvPr>
+            <p:ph type="title"/>
+          </p:nvPr>
+        </p:nvSpPr>
+        <p:spPr/>
+        <p:txBody>
+          <a:bodyPr/>
+          <a:lstStyle/>
+          <a:p>
+            <a:pPr lvl="0" indent="0" marL="0">
+              <a:buNone/>
+            </a:pPr>
+            <a:r>
+              <a:rPr/>
+              <a:t>Slide 1</a:t>
+            </a:r>
+          </a:p>
+        </p:txBody>
+      </p:sp>
+      <p:sp>
+        <p:nvSpPr>
           <p:cNvPr id="3" name="Content Placeholder 2"/>
           <p:cNvSpPr>
             <a:spLocks noGrp="1"/>
@@ -3498,21 +3217,24 @@
           <a:bodyPr/>
           <a:lstStyle/>
           <a:p>
-            <a:pPr lvl="0" indent="0" marL="0">
-              <a:buNone/>
-            </a:pPr>
+            <a:pPr lvl="0"/>
             <a:r>
               <a:rPr/>
-              <a:t>s # Abc</a:t>
-            </a:r>
-          </a:p>
-          <a:p>
-            <a:pPr lvl="0" indent="0" marL="0">
-              <a:buNone/>
-            </a:pPr>
+              <a:t>a</a:t>
+            </a:r>
+          </a:p>
+          <a:p>
+            <a:pPr lvl="0"/>
             <a:r>
               <a:rPr/>
-              <a:t>text goes here….</a:t>
+              <a:t>b</a:t>
+            </a:r>
+          </a:p>
+          <a:p>
+            <a:pPr lvl="0"/>
+            <a:r>
+              <a:rPr/>
+              <a:t>c</a:t>
             </a:r>
           </a:p>
         </p:txBody>
@@ -3549,12 +3271,7 @@
             <p:ph type="title"/>
           </p:nvPr>
         </p:nvSpPr>
-        <p:spPr>
-          <a:xfrm>
-            <a:off x="722313" y="3305176"/>
-            <a:ext cx="7772400" cy="1021556"/>
-          </a:xfrm>
-        </p:spPr>
+        <p:spPr/>
         <p:txBody>
           <a:bodyPr/>
           <a:lstStyle/>
@@ -3564,7 +3281,50 @@
             </a:pPr>
             <a:r>
               <a:rPr/>
-              <a:t>Exercise 1</a:t>
+              <a:t>Slide 2</a:t>
+            </a:r>
+          </a:p>
+        </p:txBody>
+      </p:sp>
+      <p:sp>
+        <p:nvSpPr>
+          <p:cNvPr id="3" name="Content Placeholder 2"/>
+          <p:cNvSpPr>
+            <a:spLocks noGrp="1"/>
+          </p:cNvSpPr>
+          <p:nvPr>
+            <p:ph idx="1"/>
+          </p:nvPr>
+        </p:nvSpPr>
+        <p:spPr/>
+        <p:txBody>
+          <a:bodyPr/>
+          <a:lstStyle/>
+          <a:p>
+            <a:pPr lvl="0" indent="-342900" marL="342900">
+              <a:buAutoNum type="arabicPeriod"/>
+            </a:pPr>
+            <a:r>
+              <a:rPr/>
+              <a:t>A</a:t>
+            </a:r>
+          </a:p>
+          <a:p>
+            <a:pPr lvl="0" indent="-342900" marL="342900">
+              <a:buAutoNum type="arabicPeriod"/>
+            </a:pPr>
+            <a:r>
+              <a:rPr/>
+              <a:t>B</a:t>
+            </a:r>
+          </a:p>
+          <a:p>
+            <a:pPr lvl="0" indent="-342900" marL="342900">
+              <a:buAutoNum type="arabicPeriod"/>
+            </a:pPr>
+            <a:r>
+              <a:rPr/>
+              <a:t>C</a:t>
             </a:r>
           </a:p>
         </p:txBody>
@@ -3611,259 +3371,14 @@
             </a:pPr>
             <a:r>
               <a:rPr/>
-              <a:t>a</a:t>
-            </a:r>
-          </a:p>
-        </p:txBody>
-      </p:sp>
-    </p:spTree>
-  </p:cSld>
-</p:sld>
-</file>
-
-<file path=ppt/slides/slide5.xml><?xml version="1.0" encoding="utf-8"?>
-<p:sld xmlns:a="http://schemas.openxmlformats.org/drawingml/2006/main" xmlns:r="http://schemas.openxmlformats.org/officeDocument/2006/relationships" xmlns:p="http://schemas.openxmlformats.org/presentationml/2006/main">
-  <p:cSld>
-    <p:spTree>
-      <p:nvGrpSpPr>
-        <p:cNvPr id="1" name=""/>
-        <p:cNvGrpSpPr/>
-        <p:nvPr/>
-      </p:nvGrpSpPr>
-      <p:grpSpPr>
-        <a:xfrm>
-          <a:off x="0" y="0"/>
-          <a:ext cx="0" cy="0"/>
-          <a:chOff x="0" y="0"/>
-          <a:chExt cx="0" cy="0"/>
-        </a:xfrm>
-      </p:grpSpPr>
-      <p:sp>
-        <p:nvSpPr>
-          <p:cNvPr id="2" name="Title 1"/>
-          <p:cNvSpPr>
-            <a:spLocks noGrp="1"/>
-          </p:cNvSpPr>
-          <p:nvPr>
-            <p:ph type="title"/>
-          </p:nvPr>
-        </p:nvSpPr>
-        <p:spPr/>
-        <p:txBody>
-          <a:bodyPr/>
-          <a:lstStyle/>
-          <a:p>
-            <a:pPr lvl="0" indent="0" marL="0">
-              <a:buNone/>
-            </a:pPr>
-            <a:r>
-              <a:rPr/>
-              <a:t>b</a:t>
-            </a:r>
-          </a:p>
-        </p:txBody>
-      </p:sp>
-    </p:spTree>
-  </p:cSld>
-</p:sld>
-</file>
-
-<file path=ppt/slides/slide6.xml><?xml version="1.0" encoding="utf-8"?>
-<p:sld xmlns:a="http://schemas.openxmlformats.org/drawingml/2006/main" xmlns:r="http://schemas.openxmlformats.org/officeDocument/2006/relationships" xmlns:p="http://schemas.openxmlformats.org/presentationml/2006/main">
-  <p:cSld>
-    <p:spTree>
-      <p:nvGrpSpPr>
-        <p:cNvPr id="1" name=""/>
-        <p:cNvGrpSpPr/>
-        <p:nvPr/>
-      </p:nvGrpSpPr>
-      <p:grpSpPr>
-        <a:xfrm>
-          <a:off x="0" y="0"/>
-          <a:ext cx="0" cy="0"/>
-          <a:chOff x="0" y="0"/>
-          <a:chExt cx="0" cy="0"/>
-        </a:xfrm>
-      </p:grpSpPr>
-      <p:sp>
-        <p:nvSpPr>
-          <p:cNvPr id="2" name="Title 1"/>
-          <p:cNvSpPr>
-            <a:spLocks noGrp="1"/>
-          </p:cNvSpPr>
-          <p:nvPr>
-            <p:ph type="title"/>
-          </p:nvPr>
-        </p:nvSpPr>
-        <p:spPr/>
-        <p:txBody>
-          <a:bodyPr/>
-          <a:lstStyle/>
-          <a:p>
-            <a:pPr lvl="0" indent="0" marL="0">
-              <a:buNone/>
-            </a:pPr>
-            <a:r>
-              <a:rPr/>
-              <a:t>c</a:t>
-            </a:r>
-          </a:p>
-        </p:txBody>
-      </p:sp>
-    </p:spTree>
-  </p:cSld>
-</p:sld>
-</file>
-
-<file path=ppt/slides/slide7.xml><?xml version="1.0" encoding="utf-8"?>
-<p:sld xmlns:a="http://schemas.openxmlformats.org/drawingml/2006/main" xmlns:r="http://schemas.openxmlformats.org/officeDocument/2006/relationships" xmlns:p="http://schemas.openxmlformats.org/presentationml/2006/main">
-  <p:cSld>
-    <p:spTree>
-      <p:nvGrpSpPr>
-        <p:cNvPr id="1" name=""/>
-        <p:cNvGrpSpPr/>
-        <p:nvPr/>
-      </p:nvGrpSpPr>
-      <p:grpSpPr>
-        <a:xfrm>
-          <a:off x="0" y="0"/>
-          <a:ext cx="0" cy="0"/>
-          <a:chOff x="0" y="0"/>
-          <a:chExt cx="0" cy="0"/>
-        </a:xfrm>
-      </p:grpSpPr>
-      <p:sp>
-        <p:nvSpPr>
-          <p:cNvPr id="2" name="Title 1"/>
-          <p:cNvSpPr>
-            <a:spLocks noGrp="1"/>
-          </p:cNvSpPr>
-          <p:nvPr>
-            <p:ph type="title"/>
-          </p:nvPr>
-        </p:nvSpPr>
-        <p:spPr>
-          <a:xfrm>
-            <a:off x="722313" y="3305176"/>
-            <a:ext cx="7772400" cy="1021556"/>
-          </a:xfrm>
-        </p:spPr>
-        <p:txBody>
-          <a:bodyPr/>
-          <a:lstStyle/>
-          <a:p>
-            <a:pPr lvl="0" indent="0" marL="0">
-              <a:buNone/>
-            </a:pPr>
-            <a:r>
-              <a:rPr/>
-              <a:t>Exercise 2</a:t>
-            </a:r>
-          </a:p>
-        </p:txBody>
-      </p:sp>
-    </p:spTree>
-  </p:cSld>
-</p:sld>
-</file>
-
-<file path=ppt/slides/slide8.xml><?xml version="1.0" encoding="utf-8"?>
-<p:sld xmlns:a="http://schemas.openxmlformats.org/drawingml/2006/main" xmlns:r="http://schemas.openxmlformats.org/officeDocument/2006/relationships" xmlns:p="http://schemas.openxmlformats.org/presentationml/2006/main">
-  <p:cSld>
-    <p:spTree>
-      <p:nvGrpSpPr>
-        <p:cNvPr id="1" name=""/>
-        <p:cNvGrpSpPr/>
-        <p:nvPr/>
-      </p:nvGrpSpPr>
-      <p:grpSpPr>
-        <a:xfrm>
-          <a:off x="0" y="0"/>
-          <a:ext cx="0" cy="0"/>
-          <a:chOff x="0" y="0"/>
-          <a:chExt cx="0" cy="0"/>
-        </a:xfrm>
-      </p:grpSpPr>
-      <p:sp>
-        <p:nvSpPr>
-          <p:cNvPr id="2" name="Title 1"/>
-          <p:cNvSpPr>
-            <a:spLocks noGrp="1"/>
-          </p:cNvSpPr>
-          <p:nvPr>
-            <p:ph type="title"/>
-          </p:nvPr>
-        </p:nvSpPr>
-        <p:spPr>
-          <a:xfrm>
-            <a:off x="722313" y="3305176"/>
-            <a:ext cx="7772400" cy="1021556"/>
-          </a:xfrm>
-        </p:spPr>
-        <p:txBody>
-          <a:bodyPr/>
-          <a:lstStyle/>
-          <a:p>
-            <a:pPr lvl="0" indent="0" marL="0">
-              <a:buNone/>
-            </a:pPr>
-            <a:r>
-              <a:rPr/>
-              <a:t>Exercise 3</a:t>
-            </a:r>
-          </a:p>
-        </p:txBody>
-      </p:sp>
-    </p:spTree>
-  </p:cSld>
-</p:sld>
-</file>
-
-<file path=ppt/slides/slide9.xml><?xml version="1.0" encoding="utf-8"?>
-<p:sld xmlns:a="http://schemas.openxmlformats.org/drawingml/2006/main" xmlns:r="http://schemas.openxmlformats.org/officeDocument/2006/relationships" xmlns:p="http://schemas.openxmlformats.org/presentationml/2006/main">
-  <p:cSld>
-    <p:spTree>
-      <p:nvGrpSpPr>
-        <p:cNvPr id="1" name=""/>
-        <p:cNvGrpSpPr/>
-        <p:nvPr/>
-      </p:nvGrpSpPr>
-      <p:grpSpPr>
-        <a:xfrm>
-          <a:off x="0" y="0"/>
-          <a:ext cx="0" cy="0"/>
-          <a:chOff x="0" y="0"/>
-          <a:chExt cx="0" cy="0"/>
-        </a:xfrm>
-      </p:grpSpPr>
-      <p:sp>
-        <p:nvSpPr>
-          <p:cNvPr id="2" name="Title 1"/>
-          <p:cNvSpPr>
-            <a:spLocks noGrp="1"/>
-          </p:cNvSpPr>
-          <p:nvPr>
-            <p:ph type="title"/>
-          </p:nvPr>
-        </p:nvSpPr>
-        <p:spPr/>
-        <p:txBody>
-          <a:bodyPr/>
-          <a:lstStyle/>
-          <a:p>
-            <a:pPr lvl="0" indent="0" marL="0">
-              <a:buNone/>
-            </a:pPr>
-            <a:r>
-              <a:rPr/>
-              <a:t>a</a:t>
+              <a:t>Slide 3</a:t>
             </a:r>
           </a:p>
         </p:txBody>
       </p:sp>
       <p:pic>
         <p:nvPicPr>
-          <p:cNvPr descr="elephant.png" id="0" name="Picture 1"/>
+          <p:cNvPr descr="images/elephant.png" id="0" name="Picture 1"/>
           <p:cNvPicPr>
             <a:picLocks noGrp="1" noChangeAspect="1"/>
           </p:cNvPicPr>
@@ -3921,130 +3436,6 @@
           </a:p>
         </p:txBody>
       </p:sp>
-      <mc:AlternateContent xmlns:mc="http://schemas.openxmlformats.org/markup-compatibility/2006">
-        <mc:Choice xmlns:a14="http://schemas.microsoft.com/office/drawing/2010/main" Requires="a14">
-          <p:sp>
-            <p:nvSpPr>
-              <p:cNvPr id="3" name="Content Placeholder 2"/>
-              <p:cNvSpPr>
-                <a:spLocks noGrp="1"/>
-              </p:cNvSpPr>
-              <p:nvPr>
-                <p:ph idx="1"/>
-              </p:nvPr>
-            </p:nvSpPr>
-            <p:spPr/>
-            <p:txBody>
-              <a:bodyPr/>
-              <a:lstStyle/>
-              <a:p>
-                <a:pPr lvl="0" indent="0" marL="0">
-                  <a:buNone/>
-                </a:pPr>
-                <a:r>
-                  <a:rPr/>
-                  <a:t>accepts html code</a:t>
-                </a:r>
-              </a:p>
-              <a:p>
-                <a:pPr lvl="0" indent="0" marL="0">
-                  <a:buNone/>
-                </a:pPr>
-                <a:r>
-                  <a:rPr/>
-                  <a:t>addf</a:t>
-                </a:r>
-              </a:p>
-              <a:p>
-                <a:pPr lvl="0" indent="0" marL="0">
-                  <a:buNone/>
-                </a:pPr>
-                <a14:m>
-                  <m:oMathPara xmlns:m="http://schemas.openxmlformats.org/officeDocument/2006/math">
-                    <m:oMathParaPr>
-                      <m:jc m:val="center"/>
-                    </m:oMathParaPr>
-                    <m:oMath>
-                      <m:r>
-                        <m:t>x</m:t>
-                      </m:r>
-                      <m:r>
-                        <m:rPr>
-                          <m:sty m:val="p"/>
-                        </m:rPr>
-                        <m:t>=</m:t>
-                      </m:r>
-                      <m:r>
-                        <m:t>f</m:t>
-                      </m:r>
-                      <m:d>
-                        <m:dPr>
-                          <m:begChr m:val="("/>
-                          <m:sepChr m:val=""/>
-                          <m:endChr m:val=")"/>
-                          <m:grow/>
-                        </m:dPr>
-                        <m:e>
-                          <m:r>
-                            <m:t>N</m:t>
-                          </m:r>
-                          <m:r>
-                            <m:rPr>
-                              <m:sty m:val="p"/>
-                            </m:rPr>
-                            <m:t>,</m:t>
-                          </m:r>
-                          <m:r>
-                            <m:t>K</m:t>
-                          </m:r>
-                        </m:e>
-                      </m:d>
-                    </m:oMath>
-                  </m:oMathPara>
-                </a14:m>
-              </a:p>
-              <a:p>
-                <a:pPr lvl="0" indent="0" marL="0">
-                  <a:buNone/>
-                </a:pPr>
-                <a:r>
-                  <a:rPr/>
-                  <a:t>in this case the shourt run prouction function is </a:t>
-                </a:r>
-                <a14:m>
-                  <m:oMath xmlns:m="http://schemas.openxmlformats.org/officeDocument/2006/math">
-                    <m:r>
-                      <m:t>x</m:t>
-                    </m:r>
-                    <m:r>
-                      <m:rPr>
-                        <m:sty m:val="p"/>
-                      </m:rPr>
-                      <m:t>=</m:t>
-                    </m:r>
-                    <m:r>
-                      <m:t>f</m:t>
-                    </m:r>
-                    <m:d>
-                      <m:dPr>
-                        <m:begChr m:val="("/>
-                        <m:sepChr m:val=""/>
-                        <m:endChr m:val=")"/>
-                        <m:grow/>
-                      </m:dPr>
-                      <m:e>
-                        <m:r>
-                          <m:t>N</m:t>
-                        </m:r>
-                      </m:e>
-                    </m:d>
-                  </m:oMath>
-                </a14:m>
-              </a:p>
-            </p:txBody>
-          </p:sp>
-        </mc:Choice>
-      </mc:AlternateContent>
     </p:spTree>
   </p:cSld>
 </p:sld>
